--- a/containers/figures/problem-setup-3.pptx
+++ b/containers/figures/problem-setup-3.pptx
@@ -259,7 +259,7 @@
           <a:p>
             <a:fld id="{74386EFB-BF3A-E44F-8706-07EE3741FB69}" type="datetimeFigureOut">
               <a:rPr lang="en-US" smtClean="0"/>
-              <a:t>4/20/26</a:t>
+              <a:t>7/15/26</a:t>
             </a:fld>
             <a:endParaRPr lang="en-US"/>
           </a:p>
@@ -457,7 +457,7 @@
           <a:p>
             <a:fld id="{74386EFB-BF3A-E44F-8706-07EE3741FB69}" type="datetimeFigureOut">
               <a:rPr lang="en-US" smtClean="0"/>
-              <a:t>4/20/26</a:t>
+              <a:t>7/15/26</a:t>
             </a:fld>
             <a:endParaRPr lang="en-US"/>
           </a:p>
@@ -665,7 +665,7 @@
           <a:p>
             <a:fld id="{74386EFB-BF3A-E44F-8706-07EE3741FB69}" type="datetimeFigureOut">
               <a:rPr lang="en-US" smtClean="0"/>
-              <a:t>4/20/26</a:t>
+              <a:t>7/15/26</a:t>
             </a:fld>
             <a:endParaRPr lang="en-US"/>
           </a:p>
@@ -863,7 +863,7 @@
           <a:p>
             <a:fld id="{74386EFB-BF3A-E44F-8706-07EE3741FB69}" type="datetimeFigureOut">
               <a:rPr lang="en-US" smtClean="0"/>
-              <a:t>4/20/26</a:t>
+              <a:t>7/15/26</a:t>
             </a:fld>
             <a:endParaRPr lang="en-US"/>
           </a:p>
@@ -1138,7 +1138,7 @@
           <a:p>
             <a:fld id="{74386EFB-BF3A-E44F-8706-07EE3741FB69}" type="datetimeFigureOut">
               <a:rPr lang="en-US" smtClean="0"/>
-              <a:t>4/20/26</a:t>
+              <a:t>7/15/26</a:t>
             </a:fld>
             <a:endParaRPr lang="en-US"/>
           </a:p>
@@ -1403,7 +1403,7 @@
           <a:p>
             <a:fld id="{74386EFB-BF3A-E44F-8706-07EE3741FB69}" type="datetimeFigureOut">
               <a:rPr lang="en-US" smtClean="0"/>
-              <a:t>4/20/26</a:t>
+              <a:t>7/15/26</a:t>
             </a:fld>
             <a:endParaRPr lang="en-US"/>
           </a:p>
@@ -1815,7 +1815,7 @@
           <a:p>
             <a:fld id="{74386EFB-BF3A-E44F-8706-07EE3741FB69}" type="datetimeFigureOut">
               <a:rPr lang="en-US" smtClean="0"/>
-              <a:t>4/20/26</a:t>
+              <a:t>7/15/26</a:t>
             </a:fld>
             <a:endParaRPr lang="en-US"/>
           </a:p>
@@ -1956,7 +1956,7 @@
           <a:p>
             <a:fld id="{74386EFB-BF3A-E44F-8706-07EE3741FB69}" type="datetimeFigureOut">
               <a:rPr lang="en-US" smtClean="0"/>
-              <a:t>4/20/26</a:t>
+              <a:t>7/15/26</a:t>
             </a:fld>
             <a:endParaRPr lang="en-US"/>
           </a:p>
@@ -2069,7 +2069,7 @@
           <a:p>
             <a:fld id="{74386EFB-BF3A-E44F-8706-07EE3741FB69}" type="datetimeFigureOut">
               <a:rPr lang="en-US" smtClean="0"/>
-              <a:t>4/20/26</a:t>
+              <a:t>7/15/26</a:t>
             </a:fld>
             <a:endParaRPr lang="en-US"/>
           </a:p>
@@ -2380,7 +2380,7 @@
           <a:p>
             <a:fld id="{74386EFB-BF3A-E44F-8706-07EE3741FB69}" type="datetimeFigureOut">
               <a:rPr lang="en-US" smtClean="0"/>
-              <a:t>4/20/26</a:t>
+              <a:t>7/15/26</a:t>
             </a:fld>
             <a:endParaRPr lang="en-US"/>
           </a:p>
@@ -2668,7 +2668,7 @@
           <a:p>
             <a:fld id="{74386EFB-BF3A-E44F-8706-07EE3741FB69}" type="datetimeFigureOut">
               <a:rPr lang="en-US" smtClean="0"/>
-              <a:t>4/20/26</a:t>
+              <a:t>7/15/26</a:t>
             </a:fld>
             <a:endParaRPr lang="en-US"/>
           </a:p>
@@ -2909,7 +2909,7 @@
           <a:p>
             <a:fld id="{74386EFB-BF3A-E44F-8706-07EE3741FB69}" type="datetimeFigureOut">
               <a:rPr lang="en-US" smtClean="0"/>
-              <a:t>4/20/26</a:t>
+              <a:t>7/15/26</a:t>
             </a:fld>
             <a:endParaRPr lang="en-US"/>
           </a:p>
@@ -3334,10 +3334,10 @@
       </p:grpSpPr>
       <p:sp>
         <p:nvSpPr>
-          <p:cNvPr id="19" name="Rectangle 18">
-            <a:extLst>
-              <a:ext uri="{FF2B5EF4-FFF2-40B4-BE49-F238E27FC236}">
-                <a16:creationId xmlns:a16="http://schemas.microsoft.com/office/drawing/2014/main" id="{1F3F67BA-244A-8B22-7198-3B5982F5E521}"/>
+          <p:cNvPr id="17" name="Rectangle 16">
+            <a:extLst>
+              <a:ext uri="{FF2B5EF4-FFF2-40B4-BE49-F238E27FC236}">
+                <a16:creationId xmlns:a16="http://schemas.microsoft.com/office/drawing/2014/main" id="{7707764D-04ED-06D5-1E24-7AB4BBAF7FEA}"/>
               </a:ext>
             </a:extLst>
           </p:cNvPr>
@@ -3346,111 +3346,7 @@
         </p:nvSpPr>
         <p:spPr>
           <a:xfrm>
-            <a:off x="6539625" y="4061047"/>
-            <a:ext cx="4365621" cy="1134810"/>
-          </a:xfrm>
-          <a:prstGeom prst="rect">
-            <a:avLst/>
-          </a:prstGeom>
-          <a:solidFill>
-            <a:schemeClr val="accent2">
-              <a:lumMod val="20000"/>
-              <a:lumOff val="80000"/>
-            </a:schemeClr>
-          </a:solidFill>
-        </p:spPr>
-        <p:style>
-          <a:lnRef idx="2">
-            <a:schemeClr val="accent1">
-              <a:shade val="15000"/>
-            </a:schemeClr>
-          </a:lnRef>
-          <a:fillRef idx="1">
-            <a:schemeClr val="accent1"/>
-          </a:fillRef>
-          <a:effectRef idx="0">
-            <a:schemeClr val="accent1"/>
-          </a:effectRef>
-          <a:fontRef idx="minor">
-            <a:schemeClr val="lt1"/>
-          </a:fontRef>
-        </p:style>
-        <p:txBody>
-          <a:bodyPr rtlCol="0" anchor="ctr"/>
-          <a:lstStyle/>
-          <a:p>
-            <a:pPr algn="ctr"/>
-            <a:endParaRPr lang="en-US"/>
-          </a:p>
-        </p:txBody>
-      </p:sp>
-      <p:sp>
-        <p:nvSpPr>
-          <p:cNvPr id="18" name="Rectangle 17">
-            <a:extLst>
-              <a:ext uri="{FF2B5EF4-FFF2-40B4-BE49-F238E27FC236}">
-                <a16:creationId xmlns:a16="http://schemas.microsoft.com/office/drawing/2014/main" id="{E660B119-3A73-74E8-C867-AB0140BB3B70}"/>
-              </a:ext>
-            </a:extLst>
-          </p:cNvPr>
-          <p:cNvSpPr/>
-          <p:nvPr/>
-        </p:nvSpPr>
-        <p:spPr>
-          <a:xfrm>
-            <a:off x="1077236" y="4061046"/>
-            <a:ext cx="4365621" cy="1064318"/>
-          </a:xfrm>
-          <a:prstGeom prst="rect">
-            <a:avLst/>
-          </a:prstGeom>
-          <a:solidFill>
-            <a:schemeClr val="tx2">
-              <a:lumMod val="10000"/>
-              <a:lumOff val="90000"/>
-            </a:schemeClr>
-          </a:solidFill>
-        </p:spPr>
-        <p:style>
-          <a:lnRef idx="2">
-            <a:schemeClr val="accent1">
-              <a:shade val="15000"/>
-            </a:schemeClr>
-          </a:lnRef>
-          <a:fillRef idx="1">
-            <a:schemeClr val="accent1"/>
-          </a:fillRef>
-          <a:effectRef idx="0">
-            <a:schemeClr val="accent1"/>
-          </a:effectRef>
-          <a:fontRef idx="minor">
-            <a:schemeClr val="lt1"/>
-          </a:fontRef>
-        </p:style>
-        <p:txBody>
-          <a:bodyPr rtlCol="0" anchor="ctr"/>
-          <a:lstStyle/>
-          <a:p>
-            <a:pPr algn="ctr"/>
-            <a:endParaRPr lang="en-US"/>
-          </a:p>
-        </p:txBody>
-      </p:sp>
-      <p:sp>
-        <p:nvSpPr>
-          <p:cNvPr id="17" name="Rectangle 16">
-            <a:extLst>
-              <a:ext uri="{FF2B5EF4-FFF2-40B4-BE49-F238E27FC236}">
-                <a16:creationId xmlns:a16="http://schemas.microsoft.com/office/drawing/2014/main" id="{7707764D-04ED-06D5-1E24-7AB4BBAF7FEA}"/>
-              </a:ext>
-            </a:extLst>
-          </p:cNvPr>
-          <p:cNvSpPr/>
-          <p:nvPr/>
-        </p:nvSpPr>
-        <p:spPr>
-          <a:xfrm>
-            <a:off x="6539625" y="1236829"/>
+            <a:off x="6539625" y="741070"/>
             <a:ext cx="4365621" cy="2335139"/>
           </a:xfrm>
           <a:prstGeom prst="rect">
@@ -3502,7 +3398,7 @@
         </p:nvSpPr>
         <p:spPr>
           <a:xfrm>
-            <a:off x="1077236" y="1236829"/>
+            <a:off x="1077236" y="741070"/>
             <a:ext cx="4365621" cy="2335139"/>
           </a:xfrm>
           <a:prstGeom prst="rect">
@@ -3554,7 +3450,7 @@
         </p:nvSpPr>
         <p:spPr>
           <a:xfrm flipH="1">
-            <a:off x="1077236" y="726510"/>
+            <a:off x="1077236" y="230751"/>
             <a:ext cx="5018763" cy="369332"/>
           </a:xfrm>
           <a:prstGeom prst="rect">
@@ -3593,7 +3489,7 @@
         </p:nvSpPr>
         <p:spPr>
           <a:xfrm flipH="1">
-            <a:off x="6440463" y="726510"/>
+            <a:off x="6440463" y="230751"/>
             <a:ext cx="5018763" cy="369332"/>
           </a:xfrm>
           <a:prstGeom prst="rect">
@@ -3632,7 +3528,7 @@
         </p:nvSpPr>
         <p:spPr>
           <a:xfrm>
-            <a:off x="1164921" y="2024147"/>
+            <a:off x="1164921" y="1528388"/>
             <a:ext cx="4144917" cy="1477328"/>
           </a:xfrm>
           <a:prstGeom prst="rect">
@@ -3707,7 +3603,7 @@
         </p:nvSpPr>
         <p:spPr>
           <a:xfrm>
-            <a:off x="6578252" y="2024147"/>
+            <a:off x="6578252" y="1528388"/>
             <a:ext cx="4144917" cy="1200329"/>
           </a:xfrm>
           <a:prstGeom prst="rect">
@@ -3769,7 +3665,7 @@
         </p:nvSpPr>
         <p:spPr>
           <a:xfrm>
-            <a:off x="1164921" y="1236829"/>
+            <a:off x="1164921" y="741070"/>
             <a:ext cx="3390223" cy="646331"/>
           </a:xfrm>
           <a:prstGeom prst="rect">
@@ -3818,7 +3714,7 @@
         </p:nvSpPr>
         <p:spPr>
           <a:xfrm>
-            <a:off x="6578252" y="1236829"/>
+            <a:off x="6578252" y="741070"/>
             <a:ext cx="3390223" cy="646331"/>
           </a:xfrm>
           <a:prstGeom prst="rect">
@@ -3867,7 +3763,7 @@
         </p:nvSpPr>
         <p:spPr>
           <a:xfrm>
-            <a:off x="707571" y="1338943"/>
+            <a:off x="707571" y="843184"/>
             <a:ext cx="283029" cy="2026520"/>
           </a:xfrm>
           <a:prstGeom prst="leftBrace">
@@ -3911,7 +3807,7 @@
         </p:nvSpPr>
         <p:spPr>
           <a:xfrm rot="16200000">
-            <a:off x="-63121" y="2167537"/>
+            <a:off x="-63121" y="1671778"/>
             <a:ext cx="1172052" cy="369332"/>
           </a:xfrm>
           <a:prstGeom prst="rect">
@@ -3946,8 +3842,8 @@
         </p:nvSpPr>
         <p:spPr>
           <a:xfrm>
-            <a:off x="4358988" y="3691714"/>
-            <a:ext cx="3200043" cy="369332"/>
+            <a:off x="3554758" y="3251040"/>
+            <a:ext cx="4833374" cy="400110"/>
           </a:xfrm>
           <a:prstGeom prst="rect">
             <a:avLst/>
@@ -3961,22 +3857,24 @@
           <a:lstStyle/>
           <a:p>
             <a:r>
-              <a:rPr lang="en-US" dirty="0">
+              <a:rPr lang="en-US" sz="2000" i="1" dirty="0">
                 <a:solidFill>
-                  <a:srgbClr val="7030A0"/>
+                  <a:srgbClr val="FF0000"/>
                 </a:solidFill>
+                <a:latin typeface="AkayaKanadaka" panose="02010502080401010103" pitchFamily="2" charset="77"/>
+                <a:cs typeface="AkayaKanadaka" panose="02010502080401010103" pitchFamily="2" charset="77"/>
               </a:rPr>
-              <a:t>Event:  you share with another.</a:t>
-            </a:r>
-          </a:p>
-        </p:txBody>
-      </p:sp>
-      <p:sp>
-        <p:nvSpPr>
-          <p:cNvPr id="11" name="TextBox 10">
-            <a:extLst>
-              <a:ext uri="{FF2B5EF4-FFF2-40B4-BE49-F238E27FC236}">
-                <a16:creationId xmlns:a16="http://schemas.microsoft.com/office/drawing/2014/main" id="{EADB5D0B-315A-71FD-2D53-840A1FA085F9}"/>
+              <a:t>Event:  you build a container with your code.</a:t>
+            </a:r>
+          </a:p>
+        </p:txBody>
+      </p:sp>
+      <p:sp>
+        <p:nvSpPr>
+          <p:cNvPr id="14" name="TextBox 13">
+            <a:extLst>
+              <a:ext uri="{FF2B5EF4-FFF2-40B4-BE49-F238E27FC236}">
+                <a16:creationId xmlns:a16="http://schemas.microsoft.com/office/drawing/2014/main" id="{19556ABB-E61D-B2D9-286F-806F7B01DC18}"/>
               </a:ext>
             </a:extLst>
           </p:cNvPr>
@@ -3985,95 +3883,7 @@
         </p:nvSpPr>
         <p:spPr>
           <a:xfrm>
-            <a:off x="1049944" y="4131540"/>
-            <a:ext cx="4259894" cy="923330"/>
-          </a:xfrm>
-          <a:prstGeom prst="rect">
-            <a:avLst/>
-          </a:prstGeom>
-          <a:noFill/>
-        </p:spPr>
-        <p:txBody>
-          <a:bodyPr wrap="square" rtlCol="0">
-            <a:spAutoFit/>
-          </a:bodyPr>
-          <a:lstStyle/>
-          <a:p>
-            <a:r>
-              <a:rPr lang="en-US" dirty="0"/>
-              <a:t>Required actions:</a:t>
-            </a:r>
-          </a:p>
-          <a:p>
-            <a:pPr marL="342900" indent="-342900">
-              <a:buAutoNum type="arabicPeriod"/>
-            </a:pPr>
-            <a:r>
-              <a:rPr lang="en-US" dirty="0"/>
-              <a:t>Complete all of the needs above using a container approach.</a:t>
-            </a:r>
-          </a:p>
-        </p:txBody>
-      </p:sp>
-      <p:sp>
-        <p:nvSpPr>
-          <p:cNvPr id="13" name="TextBox 12">
-            <a:extLst>
-              <a:ext uri="{FF2B5EF4-FFF2-40B4-BE49-F238E27FC236}">
-                <a16:creationId xmlns:a16="http://schemas.microsoft.com/office/drawing/2014/main" id="{55A46DDD-E70A-76BD-0092-582FA72FF349}"/>
-              </a:ext>
-            </a:extLst>
-          </p:cNvPr>
-          <p:cNvSpPr txBox="1"/>
-          <p:nvPr/>
-        </p:nvSpPr>
-        <p:spPr>
-          <a:xfrm>
-            <a:off x="6578252" y="4131540"/>
-            <a:ext cx="4144917" cy="923330"/>
-          </a:xfrm>
-          <a:prstGeom prst="rect">
-            <a:avLst/>
-          </a:prstGeom>
-          <a:noFill/>
-        </p:spPr>
-        <p:txBody>
-          <a:bodyPr wrap="square" rtlCol="0">
-            <a:spAutoFit/>
-          </a:bodyPr>
-          <a:lstStyle/>
-          <a:p>
-            <a:r>
-              <a:rPr lang="en-US" dirty="0"/>
-              <a:t>Required actions:</a:t>
-            </a:r>
-          </a:p>
-          <a:p>
-            <a:pPr marL="342900" indent="-342900">
-              <a:buAutoNum type="arabicPeriod"/>
-            </a:pPr>
-            <a:r>
-              <a:rPr lang="en-US" dirty="0"/>
-              <a:t>Complete all of the needs above using a container approach.</a:t>
-            </a:r>
-          </a:p>
-        </p:txBody>
-      </p:sp>
-      <p:sp>
-        <p:nvSpPr>
-          <p:cNvPr id="14" name="TextBox 13">
-            <a:extLst>
-              <a:ext uri="{FF2B5EF4-FFF2-40B4-BE49-F238E27FC236}">
-                <a16:creationId xmlns:a16="http://schemas.microsoft.com/office/drawing/2014/main" id="{19556ABB-E61D-B2D9-286F-806F7B01DC18}"/>
-              </a:ext>
-            </a:extLst>
-          </p:cNvPr>
-          <p:cNvSpPr txBox="1"/>
-          <p:nvPr/>
-        </p:nvSpPr>
-        <p:spPr>
-          <a:xfrm>
-            <a:off x="979491" y="5337370"/>
+            <a:off x="979491" y="4059413"/>
             <a:ext cx="4735286" cy="1477328"/>
           </a:xfrm>
           <a:prstGeom prst="rect">
@@ -4172,7 +3982,7 @@
         </p:nvSpPr>
         <p:spPr>
           <a:xfrm>
-            <a:off x="6440463" y="5337370"/>
+            <a:off x="6440463" y="4059413"/>
             <a:ext cx="4735286" cy="1200329"/>
           </a:xfrm>
           <a:prstGeom prst="rect">
@@ -4232,6 +4042,62 @@
                 </a:solidFill>
               </a:rPr>
               <a:t>Packages---no.</a:t>
+            </a:r>
+          </a:p>
+        </p:txBody>
+      </p:sp>
+      <p:sp>
+        <p:nvSpPr>
+          <p:cNvPr id="15" name="TextBox 14">
+            <a:extLst>
+              <a:ext uri="{FF2B5EF4-FFF2-40B4-BE49-F238E27FC236}">
+                <a16:creationId xmlns:a16="http://schemas.microsoft.com/office/drawing/2014/main" id="{8D889012-84BD-82ED-31FF-02E5EDBEE7EE}"/>
+              </a:ext>
+            </a:extLst>
+          </p:cNvPr>
+          <p:cNvSpPr txBox="1"/>
+          <p:nvPr/>
+        </p:nvSpPr>
+        <p:spPr>
+          <a:xfrm>
+            <a:off x="3554757" y="3534526"/>
+            <a:ext cx="4798237" cy="369332"/>
+          </a:xfrm>
+          <a:prstGeom prst="rect">
+            <a:avLst/>
+          </a:prstGeom>
+          <a:noFill/>
+        </p:spPr>
+        <p:txBody>
+          <a:bodyPr wrap="none" rtlCol="0">
+            <a:spAutoFit/>
+          </a:bodyPr>
+          <a:lstStyle/>
+          <a:p>
+            <a:r>
+              <a:rPr lang="en-US" dirty="0">
+                <a:solidFill>
+                  <a:srgbClr val="7030A0"/>
+                </a:solidFill>
+              </a:rPr>
+              <a:t>Event:  you share </a:t>
+            </a:r>
+            <a:r>
+              <a:rPr lang="en-US" b="1" dirty="0">
+                <a:solidFill>
+                  <a:srgbClr val="0432FF"/>
+                </a:solidFill>
+                <a:latin typeface="Comic Sans MS" panose="030F0902030302020204" pitchFamily="66" charset="0"/>
+              </a:rPr>
+              <a:t>your container</a:t>
+            </a:r>
+            <a:r>
+              <a:rPr lang="en-US" dirty="0">
+                <a:solidFill>
+                  <a:srgbClr val="7030A0"/>
+                </a:solidFill>
+              </a:rPr>
+              <a:t> with another.</a:t>
             </a:r>
           </a:p>
         </p:txBody>
